--- a/media/resources/files/Onduktar_Koshuu3Tutashtyr.pptx
+++ b/media/resources/files/Onduktar_Koshuu3Tutashtyr.pptx
@@ -21044,7 +21044,7 @@
             </a:pPr>
             <a:r>
               <a:rPr lang="ru-RU" dirty="0"/>
-              <a:t>Турдуу пикирлер учун ыраазычылык билдиребиз.</a:t>
+              <a:t>Түрдүү пикирлер үчүн ыраазычылык билдиребиз.</a:t>
             </a:r>
           </a:p>
           <a:p>

--- a/media/resources/files/Onduktar_Koshuu3Tutashtyr.pptx
+++ b/media/resources/files/Onduktar_Koshuu3Tutashtyr.pptx
@@ -7318,7 +7318,7 @@
                 <a:ea typeface="+mn-ea"/>
                 <a:cs typeface="+mn-cs"/>
               </a:rPr>
-              <a:t>Ошол команда үчүн квадратты талап кылуу үчүн жооп кутучасынын тиешелүү көлөкө тарабын чыкылдатыңыз/тийиңиз.</a:t>
+              <a:t>Ошол команданын квадратын ээлөө үчүн жооп кутучасынын боёлгон бөлүгүн басыңыз.</a:t>
             </a:r>
           </a:p>
           <a:p>
@@ -7951,7 +7951,7 @@
                             <a:schemeClr val="tx1"/>
                           </a:solidFill>
                         </a:rPr>
-                        <a:t>6.7</a:t>
+                        <a:t>6,7</a:t>
                       </a:r>
                     </a:p>
                   </a:txBody>
@@ -8023,7 +8023,7 @@
                             <a:schemeClr val="tx1"/>
                           </a:solidFill>
                         </a:rPr>
-                        <a:t>5.3</a:t>
+                        <a:t>5,3</a:t>
                       </a:r>
                     </a:p>
                   </a:txBody>
@@ -8095,7 +8095,7 @@
                             <a:schemeClr val="tx1"/>
                           </a:solidFill>
                         </a:rPr>
-                        <a:t>4.6</a:t>
+                        <a:t>4,6</a:t>
                       </a:r>
                     </a:p>
                   </a:txBody>
@@ -8151,7 +8151,7 @@
                             <a:schemeClr val="tx1"/>
                           </a:solidFill>
                         </a:rPr>
-                        <a:t>4.3</a:t>
+                        <a:t>4,3</a:t>
                       </a:r>
                     </a:p>
                   </a:txBody>
@@ -8214,7 +8214,7 @@
                             <a:schemeClr val="tx1"/>
                           </a:solidFill>
                         </a:rPr>
-                        <a:t>6.5</a:t>
+                        <a:t>6,5</a:t>
                       </a:r>
                     </a:p>
                   </a:txBody>
@@ -8270,7 +8270,7 @@
                             <a:schemeClr val="tx1"/>
                           </a:solidFill>
                         </a:rPr>
-                        <a:t>2.5</a:t>
+                        <a:t>2,5</a:t>
                       </a:r>
                     </a:p>
                   </a:txBody>
@@ -8342,7 +8342,7 @@
                             <a:schemeClr val="tx1"/>
                           </a:solidFill>
                         </a:rPr>
-                        <a:t>5.7</a:t>
+                        <a:t>5,7</a:t>
                       </a:r>
                     </a:p>
                   </a:txBody>
@@ -8398,7 +8398,7 @@
                             <a:schemeClr val="tx1"/>
                           </a:solidFill>
                         </a:rPr>
-                        <a:t>1.2</a:t>
+                        <a:t>1,2</a:t>
                       </a:r>
                     </a:p>
                   </a:txBody>
@@ -8461,7 +8461,7 @@
                             <a:schemeClr val="tx1"/>
                           </a:solidFill>
                         </a:rPr>
-                        <a:t>6.2</a:t>
+                        <a:t>6,2</a:t>
                       </a:r>
                     </a:p>
                   </a:txBody>
@@ -8517,7 +8517,7 @@
                             <a:schemeClr val="tx1"/>
                           </a:solidFill>
                         </a:rPr>
-                        <a:t>4.2</a:t>
+                        <a:t>4,2</a:t>
                       </a:r>
                     </a:p>
                   </a:txBody>
@@ -8589,7 +8589,7 @@
                             <a:schemeClr val="tx1"/>
                           </a:solidFill>
                         </a:rPr>
-                        <a:t>6.2</a:t>
+                        <a:t>6,2</a:t>
                       </a:r>
                     </a:p>
                   </a:txBody>
@@ -8645,7 +8645,7 @@
                             <a:schemeClr val="tx1"/>
                           </a:solidFill>
                         </a:rPr>
-                        <a:t>3.4</a:t>
+                        <a:t>3,4</a:t>
                       </a:r>
                     </a:p>
                   </a:txBody>
@@ -8764,7 +8764,7 @@
                             <a:schemeClr val="tx1"/>
                           </a:solidFill>
                         </a:rPr>
-                        <a:t>1.1</a:t>
+                        <a:t>1,1</a:t>
                       </a:r>
                     </a:p>
                   </a:txBody>
@@ -8836,7 +8836,7 @@
                             <a:schemeClr val="tx1"/>
                           </a:solidFill>
                         </a:rPr>
-                        <a:t>2.4</a:t>
+                        <a:t>2,4</a:t>
                       </a:r>
                     </a:p>
                   </a:txBody>
@@ -8892,7 +8892,7 @@
                             <a:schemeClr val="tx1"/>
                           </a:solidFill>
                         </a:rPr>
-                        <a:t>6.4</a:t>
+                        <a:t>6,4</a:t>
                       </a:r>
                     </a:p>
                   </a:txBody>
@@ -9753,7 +9753,7 @@
                           <a:latin typeface="Arial" panose="020B0604020202020204" pitchFamily="34" charset="0"/>
                           <a:cs typeface="Arial" panose="020B0604020202020204" pitchFamily="34" charset="0"/>
                         </a:rPr>
-                        <a:t>0.7 + 1.7</a:t>
+                        <a:t>0,7 + 1,7</a:t>
                       </a:r>
                     </a:p>
                   </a:txBody>
@@ -9810,7 +9810,7 @@
                           <a:latin typeface="Arial" panose="020B0604020202020204" pitchFamily="34" charset="0"/>
                           <a:cs typeface="Arial" panose="020B0604020202020204" pitchFamily="34" charset="0"/>
                         </a:rPr>
-                        <a:t>2.3 + 4.1</a:t>
+                        <a:t>2,3 + 4,1</a:t>
                       </a:r>
                     </a:p>
                   </a:txBody>
@@ -9874,7 +9874,7 @@
                           <a:latin typeface="Arial" panose="020B0604020202020204" pitchFamily="34" charset="0"/>
                           <a:cs typeface="Arial" panose="020B0604020202020204" pitchFamily="34" charset="0"/>
                         </a:rPr>
-                        <a:t>1.8 + 3.5</a:t>
+                        <a:t>1,8 + 3,5</a:t>
                       </a:r>
                     </a:p>
                   </a:txBody>
@@ -9931,7 +9931,7 @@
                           <a:latin typeface="Arial" panose="020B0604020202020204" pitchFamily="34" charset="0"/>
                           <a:cs typeface="Arial" panose="020B0604020202020204" pitchFamily="34" charset="0"/>
                         </a:rPr>
-                        <a:t>4.4 + 2.6</a:t>
+                        <a:t>4,4 + 2,6</a:t>
                       </a:r>
                     </a:p>
                   </a:txBody>
@@ -9995,7 +9995,7 @@
                           <a:latin typeface="Arial" panose="020B0604020202020204" pitchFamily="34" charset="0"/>
                           <a:cs typeface="Arial" panose="020B0604020202020204" pitchFamily="34" charset="0"/>
                         </a:rPr>
-                        <a:t>2.6 + 3.1</a:t>
+                        <a:t>2,6 + 3,1</a:t>
                       </a:r>
                     </a:p>
                   </a:txBody>
@@ -10052,7 +10052,7 @@
                           <a:latin typeface="Arial" panose="020B0604020202020204" pitchFamily="34" charset="0"/>
                           <a:cs typeface="Arial" panose="020B0604020202020204" pitchFamily="34" charset="0"/>
                         </a:rPr>
-                        <a:t>0.6 + 0.5</a:t>
+                        <a:t>0,6 + 0,5</a:t>
                       </a:r>
                     </a:p>
                   </a:txBody>
@@ -10116,7 +10116,7 @@
                           <a:latin typeface="Arial" panose="020B0604020202020204" pitchFamily="34" charset="0"/>
                           <a:cs typeface="Arial" panose="020B0604020202020204" pitchFamily="34" charset="0"/>
                         </a:rPr>
-                        <a:t>3.6 + 2.6</a:t>
+                        <a:t>3,6 + 2,6</a:t>
                       </a:r>
                     </a:p>
                   </a:txBody>
@@ -10173,7 +10173,7 @@
                           <a:latin typeface="Arial" panose="020B0604020202020204" pitchFamily="34" charset="0"/>
                           <a:cs typeface="Arial" panose="020B0604020202020204" pitchFamily="34" charset="0"/>
                         </a:rPr>
-                        <a:t>2.8 + 3.7</a:t>
+                        <a:t>2,8 + 3,7</a:t>
                       </a:r>
                     </a:p>
                   </a:txBody>
@@ -10237,7 +10237,7 @@
                           <a:latin typeface="Arial" panose="020B0604020202020204" pitchFamily="34" charset="0"/>
                           <a:cs typeface="Arial" panose="020B0604020202020204" pitchFamily="34" charset="0"/>
                         </a:rPr>
-                        <a:t>1.8 + 1.6</a:t>
+                        <a:t>1,8 + 1,6</a:t>
                       </a:r>
                     </a:p>
                   </a:txBody>
@@ -10294,7 +10294,7 @@
                           <a:latin typeface="Arial" panose="020B0604020202020204" pitchFamily="34" charset="0"/>
                           <a:cs typeface="Arial" panose="020B0604020202020204" pitchFamily="34" charset="0"/>
                         </a:rPr>
-                        <a:t>1.7 + 2.5</a:t>
+                        <a:t>1,7 + 2,5</a:t>
                       </a:r>
                     </a:p>
                   </a:txBody>
@@ -10358,7 +10358,7 @@
                           <a:latin typeface="Arial" panose="020B0604020202020204" pitchFamily="34" charset="0"/>
                           <a:cs typeface="Arial" panose="020B0604020202020204" pitchFamily="34" charset="0"/>
                         </a:rPr>
-                        <a:t>0.9 + 0.3</a:t>
+                        <a:t>0,9 + 0,3</a:t>
                       </a:r>
                     </a:p>
                   </a:txBody>
@@ -10415,7 +10415,7 @@
                           <a:latin typeface="Arial" panose="020B0604020202020204" pitchFamily="34" charset="0"/>
                           <a:cs typeface="Arial" panose="020B0604020202020204" pitchFamily="34" charset="0"/>
                         </a:rPr>
-                        <a:t>5.5 + 0.7</a:t>
+                        <a:t>5,5 + 0,7</a:t>
                       </a:r>
                     </a:p>
                   </a:txBody>
@@ -10479,7 +10479,7 @@
                           <a:latin typeface="Arial" panose="020B0604020202020204" pitchFamily="34" charset="0"/>
                           <a:cs typeface="Arial" panose="020B0604020202020204" pitchFamily="34" charset="0"/>
                         </a:rPr>
-                        <a:t>4.8 + 1.9</a:t>
+                        <a:t>4,8 + 1,9</a:t>
                       </a:r>
                     </a:p>
                   </a:txBody>
@@ -10536,7 +10536,7 @@
                           <a:latin typeface="Arial" panose="020B0604020202020204" pitchFamily="34" charset="0"/>
                           <a:cs typeface="Arial" panose="020B0604020202020204" pitchFamily="34" charset="0"/>
                         </a:rPr>
-                        <a:t>2.9 + 1.4</a:t>
+                        <a:t>2,9 + 1,4</a:t>
                       </a:r>
                     </a:p>
                   </a:txBody>
@@ -10600,7 +10600,7 @@
                           <a:latin typeface="Arial" panose="020B0604020202020204" pitchFamily="34" charset="0"/>
                           <a:cs typeface="Arial" panose="020B0604020202020204" pitchFamily="34" charset="0"/>
                         </a:rPr>
-                        <a:t>0.6 + 1.9</a:t>
+                        <a:t>0,6 + 1,9</a:t>
                       </a:r>
                     </a:p>
                   </a:txBody>
@@ -10657,7 +10657,7 @@
                           <a:latin typeface="Arial" panose="020B0604020202020204" pitchFamily="34" charset="0"/>
                           <a:cs typeface="Arial" panose="020B0604020202020204" pitchFamily="34" charset="0"/>
                         </a:rPr>
-                        <a:t>3.5 + 1.1</a:t>
+                        <a:t>3,5 + 1,1</a:t>
                       </a:r>
                     </a:p>
                   </a:txBody>
